--- a/exports/01_minimal_pitch.pptx
+++ b/exports/01_minimal_pitch.pptx
@@ -504,7 +504,8 @@
           <a:p>
             <a:r>
               <a:rPr lang="en-US" dirty="0"/>
-              <a:t>Welcome everyone to today's executive summary.</a:t>
+              <a:t>Welcome everyone to today's executive summary.
+Source: 01_minimal_pitch.pdf</a:t>
             </a:r>
             <a:endParaRPr lang="en-US" dirty="0"/>
           </a:p>
@@ -592,7 +593,8 @@
           <a:p>
             <a:r>
               <a:rPr lang="en-US" dirty="0"/>
-              <a:t>These are the three foundational pillars.</a:t>
+              <a:t>These are the three foundational pillars.
+Source: 01_minimal_pitch.pdf</a:t>
             </a:r>
             <a:endParaRPr lang="en-US" dirty="0"/>
           </a:p>
@@ -680,7 +682,8 @@
           <a:p>
             <a:r>
               <a:rPr lang="en-US" dirty="0"/>
-              <a:t>Open the floor for questions.</a:t>
+              <a:t>Open the floor for questions.
+Source: 01_minimal_pitch.pdf</a:t>
             </a:r>
             <a:endParaRPr lang="en-US" dirty="0"/>
           </a:p>
